--- a/public/fun/cards/office/office-44.pptx
+++ b/public/fun/cards/office/office-44.pptx
@@ -3085,7 +3085,7 @@
     <p:bg>
       <p:bgPr>
         <a:solidFill>
-          <a:srgbClr val="FBF8F2"/>
+          <a:srgbClr val="F3F4F6"/>
         </a:solidFill>
         <a:effectLst/>
       </p:bgPr>
@@ -3099,38 +3099,20 @@
       <p:grpSpPr/>
       <p:sp>
         <p:nvSpPr>
-          <p:cNvPr id="2" name="Freeform 1"/>
+          <p:cNvPr id="2" name="Rectangle 1"/>
           <p:cNvSpPr/>
           <p:nvPr/>
         </p:nvSpPr>
         <p:spPr>
           <a:xfrm>
-            <a:off x="1944000" y="540000"/>
-            <a:ext cx="1296000" cy="1260000"/>
+            <a:off x="252000" y="144000"/>
+            <a:ext cx="201600" cy="21600"/>
           </a:xfrm>
-          <a:custGeom>
+          <a:prstGeom prst="rect">
             <a:avLst/>
-            <a:gdLst/>
-            <a:ahLst/>
-            <a:cxnLst/>
-            <a:rect l="l" t="t" r="r" b="b"/>
-            <a:pathLst>
-              <a:path w="1296000" h="1260000">
-                <a:moveTo>
-                  <a:pt x="1296000" y="1260000"/>
-                </a:moveTo>
-                <a:lnTo>
-                  <a:pt x="1296000" y="0"/>
-                </a:lnTo>
-                <a:lnTo>
-                  <a:pt x="0" y="1260000"/>
-                </a:lnTo>
-                <a:close/>
-              </a:path>
-            </a:pathLst>
-          </a:custGeom>
+          </a:prstGeom>
           <a:solidFill>
-            <a:srgbClr val="3B7D91"/>
+            <a:srgbClr val="0077FF"/>
           </a:solidFill>
           <a:ln>
             <a:noFill/>
@@ -3146,177 +3128,14 @@
       </p:sp>
       <p:sp>
         <p:nvSpPr>
-          <p:cNvPr id="3" name="Freeform 2"/>
-          <p:cNvSpPr/>
+          <p:cNvPr id="3" name="텍스트"/>
+          <p:cNvSpPr txBox="1"/>
           <p:nvPr/>
         </p:nvSpPr>
         <p:spPr>
           <a:xfrm>
-            <a:off x="2520000" y="1080000"/>
-            <a:ext cx="720000" cy="720000"/>
-          </a:xfrm>
-          <a:custGeom>
-            <a:avLst/>
-            <a:gdLst/>
-            <a:ahLst/>
-            <a:cxnLst/>
-            <a:rect l="l" t="t" r="r" b="b"/>
-            <a:pathLst>
-              <a:path w="720000" h="720000">
-                <a:moveTo>
-                  <a:pt x="720000" y="720000"/>
-                </a:moveTo>
-                <a:lnTo>
-                  <a:pt x="720000" y="0"/>
-                </a:lnTo>
-                <a:lnTo>
-                  <a:pt x="0" y="720000"/>
-                </a:lnTo>
-                <a:close/>
-              </a:path>
-            </a:pathLst>
-          </a:custGeom>
-          <a:solidFill>
-            <a:srgbClr val="C8DBE0">
-              <a:alpha val="90000"/>
-            </a:srgbClr>
-          </a:solidFill>
-          <a:ln>
-            <a:noFill/>
-          </a:ln>
-        </p:spPr>
-        <p:txBody>
-          <a:bodyPr rtlCol="0" anchor="ctr"/>
-          <a:lstStyle/>
-          <a:p>
-            <a:pPr algn="ctr"/>
-          </a:p>
-        </p:txBody>
-      </p:sp>
-      <p:sp>
-        <p:nvSpPr>
-          <p:cNvPr id="4" name="Rounded Rectangle 3"/>
-          <p:cNvSpPr/>
-          <p:nvPr/>
-        </p:nvSpPr>
-        <p:spPr>
-          <a:xfrm>
-            <a:off x="2856096" y="1491984"/>
-            <a:ext cx="53280" cy="95904"/>
-          </a:xfrm>
-          <a:prstGeom prst="roundRect">
-            <a:avLst>
-              <a:gd name="adj" fmla="val 10000"/>
-            </a:avLst>
-          </a:prstGeom>
-          <a:solidFill>
-            <a:srgbClr val="FFFFFF"/>
-          </a:solidFill>
-          <a:ln>
-            <a:noFill/>
-          </a:ln>
-        </p:spPr>
-        <p:txBody>
-          <a:bodyPr rtlCol="0" anchor="ctr"/>
-          <a:lstStyle/>
-          <a:p>
-            <a:pPr algn="ctr"/>
-          </a:p>
-        </p:txBody>
-      </p:sp>
-      <p:sp>
-        <p:nvSpPr>
-          <p:cNvPr id="5" name="Rounded Rectangle 4"/>
-          <p:cNvSpPr/>
-          <p:nvPr/>
-        </p:nvSpPr>
-        <p:spPr>
-          <a:xfrm>
-            <a:off x="2925360" y="1438704"/>
-            <a:ext cx="53280" cy="149184"/>
-          </a:xfrm>
-          <a:prstGeom prst="roundRect">
-            <a:avLst>
-              <a:gd name="adj" fmla="val 10000"/>
-            </a:avLst>
-          </a:prstGeom>
-          <a:solidFill>
-            <a:srgbClr val="737373"/>
-          </a:solidFill>
-          <a:ln>
-            <a:noFill/>
-          </a:ln>
-        </p:spPr>
-        <p:txBody>
-          <a:bodyPr rtlCol="0" anchor="ctr"/>
-          <a:lstStyle/>
-          <a:p>
-            <a:pPr algn="ctr"/>
-          </a:p>
-        </p:txBody>
-      </p:sp>
-      <p:sp>
-        <p:nvSpPr>
-          <p:cNvPr id="6" name="Rounded Rectangle 5"/>
-          <p:cNvSpPr/>
-          <p:nvPr/>
-        </p:nvSpPr>
-        <p:spPr>
-          <a:xfrm>
-            <a:off x="2994624" y="1374768"/>
-            <a:ext cx="53280" cy="213120"/>
-          </a:xfrm>
-          <a:prstGeom prst="roundRect">
-            <a:avLst>
-              <a:gd name="adj" fmla="val 10000"/>
-            </a:avLst>
-          </a:prstGeom>
-          <a:solidFill>
-            <a:srgbClr val="FFFFFF"/>
-          </a:solidFill>
-          <a:ln>
-            <a:noFill/>
-          </a:ln>
-        </p:spPr>
-        <p:txBody>
-          <a:bodyPr rtlCol="0" anchor="ctr"/>
-          <a:lstStyle/>
-          <a:p>
-            <a:pPr algn="ctr"/>
-          </a:p>
-        </p:txBody>
-      </p:sp>
-      <p:cxnSp>
-        <p:nvCxnSpPr>
-          <p:cNvPr id="7" name="Connector 6"/>
-          <p:cNvCxnSpPr/>
-          <p:nvPr/>
-        </p:nvCxnSpPr>
-        <p:spPr>
-          <a:xfrm>
-            <a:off x="2834784" y="1598544"/>
-            <a:ext cx="234432" cy="0"/>
-          </a:xfrm>
-          <a:prstGeom prst="line">
-            <a:avLst/>
-          </a:prstGeom>
-          <a:ln w="10656">
-            <a:solidFill>
-              <a:srgbClr val="737373"/>
-            </a:solidFill>
-          </a:ln>
-        </p:spPr>
-      </p:cxnSp>
-      <p:sp>
-        <p:nvSpPr>
-          <p:cNvPr id="8" name="텍스트"/>
-          <p:cNvSpPr txBox="1"/>
-          <p:nvPr/>
-        </p:nvSpPr>
-        <p:spPr>
-          <a:xfrm>
-            <a:off x="252000" y="201600"/>
-            <a:ext cx="1800000" cy="100800"/>
+            <a:off x="252000" y="273600"/>
+            <a:ext cx="2160000" cy="360000"/>
           </a:xfrm>
           <a:prstGeom prst="rect">
             <a:avLst/>
@@ -3331,32 +3150,32 @@
           <a:p>
             <a:pPr algn="l">
               <a:lnSpc>
-                <a:spcPts val="1087"/>
+                <a:spcPts val="3190"/>
               </a:lnSpc>
             </a:pPr>
             <a:r>
-              <a:rPr sz="750" b="1" spc="150">
+              <a:rPr sz="2200" b="1">
                 <a:solidFill>
-                  <a:srgbClr val="796E52"/>
+                  <a:srgbClr val="12151C"/>
                 </a:solidFill>
                 <a:latin typeface="맑은 고딕"/>
                 <a:ea typeface="맑은 고딕"/>
               </a:rPr>
-              <a:t>회사명 · 부서명</a:t>
-            </a:r>
-          </a:p>
-        </p:txBody>
-      </p:sp>
-      <p:sp>
-        <p:nvSpPr>
-          <p:cNvPr id="9" name="텍스트"/>
+              <a:t>연주혁</a:t>
+            </a:r>
+          </a:p>
+        </p:txBody>
+      </p:sp>
+      <p:sp>
+        <p:nvSpPr>
+          <p:cNvPr id="4" name="텍스트"/>
           <p:cNvSpPr txBox="1"/>
           <p:nvPr/>
         </p:nvSpPr>
         <p:spPr>
           <a:xfrm>
-            <a:off x="252000" y="360000"/>
-            <a:ext cx="2016000" cy="313692"/>
+            <a:off x="252000" y="676800"/>
+            <a:ext cx="2160000" cy="171451"/>
           </a:xfrm>
           <a:prstGeom prst="rect">
             <a:avLst/>
@@ -3371,32 +3190,32 @@
           <a:p>
             <a:pPr algn="l">
               <a:lnSpc>
-                <a:spcPts val="2755"/>
+                <a:spcPts val="1305"/>
               </a:lnSpc>
             </a:pPr>
             <a:r>
-              <a:rPr sz="1900" b="1" spc="50">
+              <a:rPr sz="900" b="0">
                 <a:solidFill>
-                  <a:srgbClr val="544212"/>
+                  <a:srgbClr val="6B7280"/>
                 </a:solidFill>
                 <a:latin typeface="맑은 고딕"/>
                 <a:ea typeface="맑은 고딕"/>
               </a:rPr>
-              <a:t>연주혁</a:t>
-            </a:r>
-          </a:p>
-        </p:txBody>
-      </p:sp>
-      <p:sp>
-        <p:nvSpPr>
-          <p:cNvPr id="10" name="텍스트"/>
+              <a:t>디자인팀 팀장</a:t>
+            </a:r>
+          </a:p>
+        </p:txBody>
+      </p:sp>
+      <p:sp>
+        <p:nvSpPr>
+          <p:cNvPr id="5" name="텍스트"/>
           <p:cNvSpPr txBox="1"/>
           <p:nvPr/>
         </p:nvSpPr>
         <p:spPr>
           <a:xfrm>
-            <a:off x="252000" y="655200"/>
-            <a:ext cx="1872000" cy="122400"/>
+            <a:off x="1548000" y="230400"/>
+            <a:ext cx="1440000" cy="123826"/>
           </a:xfrm>
           <a:prstGeom prst="rect">
             <a:avLst/>
@@ -3409,63 +3228,55 @@
           </a:bodyPr>
           <a:lstStyle/>
           <a:p>
-            <a:pPr algn="l">
+            <a:pPr algn="r">
               <a:lnSpc>
-                <a:spcPts val="1232"/>
+                <a:spcPts val="942"/>
               </a:lnSpc>
             </a:pPr>
             <a:r>
-              <a:rPr sz="850" b="1">
+              <a:rPr sz="650" b="1" spc="200">
                 <a:solidFill>
-                  <a:srgbClr val="38778A"/>
+                  <a:srgbClr val="6B7280"/>
                 </a:solidFill>
                 <a:latin typeface="맑은 고딕"/>
                 <a:ea typeface="맑은 고딕"/>
               </a:rPr>
-              <a:t>디자인팀 팀장</a:t>
-            </a:r>
-          </a:p>
-        </p:txBody>
-      </p:sp>
-      <p:sp>
-        <p:nvSpPr>
-          <p:cNvPr id="11" name="Rectangle 10"/>
-          <p:cNvSpPr/>
+              <a:t>회사명 · 부서명</a:t>
+            </a:r>
+          </a:p>
+        </p:txBody>
+      </p:sp>
+      <p:cxnSp>
+        <p:nvCxnSpPr>
+          <p:cNvPr id="6" name="Connector 5"/>
+          <p:cNvCxnSpPr/>
           <p:nvPr/>
-        </p:nvSpPr>
+        </p:nvCxnSpPr>
         <p:spPr>
           <a:xfrm>
-            <a:off x="252000" y="864000"/>
-            <a:ext cx="230400" cy="14400"/>
+            <a:off x="252000" y="1051200"/>
+            <a:ext cx="2736000" cy="0"/>
           </a:xfrm>
-          <a:prstGeom prst="rect">
+          <a:prstGeom prst="line">
             <a:avLst/>
           </a:prstGeom>
-          <a:solidFill>
-            <a:srgbClr val="3B7D91"/>
-          </a:solidFill>
-          <a:ln>
-            <a:noFill/>
+          <a:ln w="5760">
+            <a:solidFill>
+              <a:srgbClr val="DCDFE4"/>
+            </a:solidFill>
           </a:ln>
         </p:spPr>
-        <p:txBody>
-          <a:bodyPr rtlCol="0" anchor="ctr"/>
-          <a:lstStyle/>
-          <a:p>
-            <a:pPr algn="ctr"/>
-          </a:p>
-        </p:txBody>
-      </p:sp>
-      <p:sp>
-        <p:nvSpPr>
-          <p:cNvPr id="12" name="텍스트"/>
+      </p:cxnSp>
+      <p:sp>
+        <p:nvSpPr>
+          <p:cNvPr id="7" name="텍스트"/>
           <p:cNvSpPr txBox="1"/>
           <p:nvPr/>
         </p:nvSpPr>
         <p:spPr>
           <a:xfrm>
-            <a:off x="252000" y="1044000"/>
-            <a:ext cx="122400" cy="168911"/>
+            <a:off x="252000" y="1123200"/>
+            <a:ext cx="576000" cy="99061"/>
           </a:xfrm>
           <a:prstGeom prst="rect">
             <a:avLst/>
@@ -3480,32 +3291,32 @@
           <a:p>
             <a:pPr algn="l">
               <a:lnSpc>
-                <a:spcPts val="1015"/>
+                <a:spcPts val="754"/>
               </a:lnSpc>
             </a:pPr>
             <a:r>
-              <a:rPr sz="700" b="1">
+              <a:rPr sz="520" b="1" spc="150">
                 <a:solidFill>
-                  <a:srgbClr val="38778A"/>
+                  <a:srgbClr val="6B7280"/>
                 </a:solidFill>
                 <a:latin typeface="맑은 고딕"/>
                 <a:ea typeface="맑은 고딕"/>
               </a:rPr>
-              <a:t>T</a:t>
-            </a:r>
-          </a:p>
-        </p:txBody>
-      </p:sp>
-      <p:sp>
-        <p:nvSpPr>
-          <p:cNvPr id="13" name="텍스트"/>
+              <a:t>TEL</a:t>
+            </a:r>
+          </a:p>
+        </p:txBody>
+      </p:sp>
+      <p:sp>
+        <p:nvSpPr>
+          <p:cNvPr id="8" name="텍스트"/>
           <p:cNvSpPr txBox="1"/>
           <p:nvPr/>
         </p:nvSpPr>
         <p:spPr>
           <a:xfrm>
-            <a:off x="396000" y="1044000"/>
-            <a:ext cx="1584000" cy="168911"/>
+            <a:off x="900000" y="1101600"/>
+            <a:ext cx="2088000" cy="142876"/>
           </a:xfrm>
           <a:prstGeom prst="rect">
             <a:avLst/>
@@ -3520,13 +3331,13 @@
           <a:p>
             <a:pPr algn="l">
               <a:lnSpc>
-                <a:spcPts val="1015"/>
+                <a:spcPts val="1087"/>
               </a:lnSpc>
             </a:pPr>
             <a:r>
-              <a:rPr sz="700" b="0">
+              <a:rPr sz="750" b="0">
                 <a:solidFill>
-                  <a:srgbClr val="544212"/>
+                  <a:srgbClr val="12151C"/>
                 </a:solidFill>
                 <a:latin typeface="맑은 고딕"/>
                 <a:ea typeface="맑은 고딕"/>
@@ -3536,16 +3347,37 @@
           </a:p>
         </p:txBody>
       </p:sp>
-      <p:sp>
-        <p:nvSpPr>
-          <p:cNvPr id="14" name="텍스트"/>
+      <p:cxnSp>
+        <p:nvCxnSpPr>
+          <p:cNvPr id="9" name="Connector 8"/>
+          <p:cNvCxnSpPr/>
+          <p:nvPr/>
+        </p:nvCxnSpPr>
+        <p:spPr>
+          <a:xfrm>
+            <a:off x="252000" y="1274400"/>
+            <a:ext cx="2736000" cy="0"/>
+          </a:xfrm>
+          <a:prstGeom prst="line">
+            <a:avLst/>
+          </a:prstGeom>
+          <a:ln w="5760">
+            <a:solidFill>
+              <a:srgbClr val="DCDFE4"/>
+            </a:solidFill>
+          </a:ln>
+        </p:spPr>
+      </p:cxnSp>
+      <p:sp>
+        <p:nvSpPr>
+          <p:cNvPr id="10" name="텍스트"/>
           <p:cNvSpPr txBox="1"/>
           <p:nvPr/>
         </p:nvSpPr>
         <p:spPr>
           <a:xfrm>
-            <a:off x="252000" y="1212911"/>
-            <a:ext cx="122400" cy="168911"/>
+            <a:off x="252000" y="1346400"/>
+            <a:ext cx="576000" cy="99061"/>
           </a:xfrm>
           <a:prstGeom prst="rect">
             <a:avLst/>
@@ -3560,32 +3392,32 @@
           <a:p>
             <a:pPr algn="l">
               <a:lnSpc>
-                <a:spcPts val="1015"/>
+                <a:spcPts val="754"/>
               </a:lnSpc>
             </a:pPr>
             <a:r>
-              <a:rPr sz="700" b="1">
+              <a:rPr sz="520" b="1" spc="150">
                 <a:solidFill>
-                  <a:srgbClr val="38778A"/>
+                  <a:srgbClr val="6B7280"/>
                 </a:solidFill>
                 <a:latin typeface="맑은 고딕"/>
                 <a:ea typeface="맑은 고딕"/>
               </a:rPr>
-              <a:t>E</a:t>
-            </a:r>
-          </a:p>
-        </p:txBody>
-      </p:sp>
-      <p:sp>
-        <p:nvSpPr>
-          <p:cNvPr id="15" name="텍스트"/>
+              <a:t>MAIL</a:t>
+            </a:r>
+          </a:p>
+        </p:txBody>
+      </p:sp>
+      <p:sp>
+        <p:nvSpPr>
+          <p:cNvPr id="11" name="텍스트"/>
           <p:cNvSpPr txBox="1"/>
           <p:nvPr/>
         </p:nvSpPr>
         <p:spPr>
           <a:xfrm>
-            <a:off x="396000" y="1212911"/>
-            <a:ext cx="1584000" cy="168911"/>
+            <a:off x="900000" y="1324800"/>
+            <a:ext cx="2088000" cy="142876"/>
           </a:xfrm>
           <a:prstGeom prst="rect">
             <a:avLst/>
@@ -3600,13 +3432,13 @@
           <a:p>
             <a:pPr algn="l">
               <a:lnSpc>
-                <a:spcPts val="1015"/>
+                <a:spcPts val="1087"/>
               </a:lnSpc>
             </a:pPr>
             <a:r>
-              <a:rPr sz="700" b="0">
+              <a:rPr sz="750" b="0">
                 <a:solidFill>
-                  <a:srgbClr val="544212"/>
+                  <a:srgbClr val="12151C"/>
                 </a:solidFill>
                 <a:latin typeface="맑은 고딕"/>
                 <a:ea typeface="맑은 고딕"/>
@@ -3616,16 +3448,37 @@
           </a:p>
         </p:txBody>
       </p:sp>
-      <p:sp>
-        <p:nvSpPr>
-          <p:cNvPr id="16" name="텍스트"/>
+      <p:cxnSp>
+        <p:nvCxnSpPr>
+          <p:cNvPr id="12" name="Connector 11"/>
+          <p:cNvCxnSpPr/>
+          <p:nvPr/>
+        </p:nvCxnSpPr>
+        <p:spPr>
+          <a:xfrm>
+            <a:off x="252000" y="1497600"/>
+            <a:ext cx="2736000" cy="0"/>
+          </a:xfrm>
+          <a:prstGeom prst="line">
+            <a:avLst/>
+          </a:prstGeom>
+          <a:ln w="5760">
+            <a:solidFill>
+              <a:srgbClr val="DCDFE4"/>
+            </a:solidFill>
+          </a:ln>
+        </p:spPr>
+      </p:cxnSp>
+      <p:sp>
+        <p:nvSpPr>
+          <p:cNvPr id="13" name="텍스트"/>
           <p:cNvSpPr txBox="1"/>
           <p:nvPr/>
         </p:nvSpPr>
         <p:spPr>
           <a:xfrm>
-            <a:off x="252000" y="1381822"/>
-            <a:ext cx="122400" cy="168911"/>
+            <a:off x="252000" y="1569600"/>
+            <a:ext cx="576000" cy="99061"/>
           </a:xfrm>
           <a:prstGeom prst="rect">
             <a:avLst/>
@@ -3640,32 +3493,32 @@
           <a:p>
             <a:pPr algn="l">
               <a:lnSpc>
-                <a:spcPts val="1015"/>
+                <a:spcPts val="754"/>
               </a:lnSpc>
             </a:pPr>
             <a:r>
-              <a:rPr sz="700" b="1">
+              <a:rPr sz="520" b="1" spc="150">
                 <a:solidFill>
-                  <a:srgbClr val="38778A"/>
+                  <a:srgbClr val="6B7280"/>
                 </a:solidFill>
                 <a:latin typeface="맑은 고딕"/>
                 <a:ea typeface="맑은 고딕"/>
               </a:rPr>
-              <a:t>A</a:t>
-            </a:r>
-          </a:p>
-        </p:txBody>
-      </p:sp>
-      <p:sp>
-        <p:nvSpPr>
-          <p:cNvPr id="17" name="텍스트"/>
+              <a:t>ADDR</a:t>
+            </a:r>
+          </a:p>
+        </p:txBody>
+      </p:sp>
+      <p:sp>
+        <p:nvSpPr>
+          <p:cNvPr id="14" name="텍스트"/>
           <p:cNvSpPr txBox="1"/>
           <p:nvPr/>
         </p:nvSpPr>
         <p:spPr>
           <a:xfrm>
-            <a:off x="396000" y="1381822"/>
-            <a:ext cx="1584000" cy="168911"/>
+            <a:off x="900000" y="1548000"/>
+            <a:ext cx="2088000" cy="142876"/>
           </a:xfrm>
           <a:prstGeom prst="rect">
             <a:avLst/>
@@ -3680,13 +3533,13 @@
           <a:p>
             <a:pPr algn="l">
               <a:lnSpc>
-                <a:spcPts val="1015"/>
+                <a:spcPts val="1087"/>
               </a:lnSpc>
             </a:pPr>
             <a:r>
-              <a:rPr sz="700" b="0">
+              <a:rPr sz="750" b="0">
                 <a:solidFill>
-                  <a:srgbClr val="544212"/>
+                  <a:srgbClr val="12151C"/>
                 </a:solidFill>
                 <a:latin typeface="맑은 고딕"/>
                 <a:ea typeface="맑은 고딕"/>
@@ -3696,6 +3549,27 @@
           </a:p>
         </p:txBody>
       </p:sp>
+      <p:cxnSp>
+        <p:nvCxnSpPr>
+          <p:cNvPr id="15" name="Connector 14"/>
+          <p:cNvCxnSpPr/>
+          <p:nvPr/>
+        </p:nvCxnSpPr>
+        <p:spPr>
+          <a:xfrm>
+            <a:off x="252000" y="1720800"/>
+            <a:ext cx="2736000" cy="0"/>
+          </a:xfrm>
+          <a:prstGeom prst="line">
+            <a:avLst/>
+          </a:prstGeom>
+          <a:ln w="5760">
+            <a:solidFill>
+              <a:srgbClr val="DCDFE4"/>
+            </a:solidFill>
+          </a:ln>
+        </p:spPr>
+      </p:cxnSp>
     </p:spTree>
   </p:cSld>
   <p:clrMapOvr>
@@ -3710,7 +3584,7 @@
     <p:bg>
       <p:bgPr>
         <a:solidFill>
-          <a:srgbClr val="FBF8EE"/>
+          <a:srgbClr val="E6F1FF"/>
         </a:solidFill>
         <a:effectLst/>
       </p:bgPr>
@@ -3722,413 +3596,22 @@
         <p:nvPr/>
       </p:nvGrpSpPr>
       <p:grpSpPr/>
-      <p:cxnSp>
-        <p:nvCxnSpPr>
-          <p:cNvPr id="2" name="Connector 1"/>
-          <p:cNvCxnSpPr/>
+      <p:sp>
+        <p:nvSpPr>
+          <p:cNvPr id="2" name="Rectangle 1"/>
+          <p:cNvSpPr/>
           <p:nvPr/>
-        </p:nvCxnSpPr>
+        </p:nvSpPr>
         <p:spPr>
           <a:xfrm>
-            <a:off x="0" y="93600"/>
-            <a:ext cx="3240000" cy="0"/>
-          </a:xfrm>
-          <a:prstGeom prst="line">
-            <a:avLst/>
-          </a:prstGeom>
-          <a:ln w="7200">
-            <a:solidFill>
-              <a:srgbClr val="A78425">
-                <a:alpha val="30000"/>
-              </a:srgbClr>
-            </a:solidFill>
-          </a:ln>
-        </p:spPr>
-      </p:cxnSp>
-      <p:cxnSp>
-        <p:nvCxnSpPr>
-          <p:cNvPr id="3" name="Connector 2"/>
-          <p:cNvCxnSpPr/>
-          <p:nvPr/>
-        </p:nvCxnSpPr>
-        <p:spPr>
-          <a:xfrm>
-            <a:off x="0" y="201600"/>
-            <a:ext cx="3240000" cy="0"/>
-          </a:xfrm>
-          <a:prstGeom prst="line">
-            <a:avLst/>
-          </a:prstGeom>
-          <a:ln w="7200">
-            <a:solidFill>
-              <a:srgbClr val="A78425">
-                <a:alpha val="30000"/>
-              </a:srgbClr>
-            </a:solidFill>
-          </a:ln>
-        </p:spPr>
-      </p:cxnSp>
-      <p:cxnSp>
-        <p:nvCxnSpPr>
-          <p:cNvPr id="4" name="Connector 3"/>
-          <p:cNvCxnSpPr/>
-          <p:nvPr/>
-        </p:nvCxnSpPr>
-        <p:spPr>
-          <a:xfrm>
-            <a:off x="0" y="309600"/>
-            <a:ext cx="3240000" cy="0"/>
-          </a:xfrm>
-          <a:prstGeom prst="line">
-            <a:avLst/>
-          </a:prstGeom>
-          <a:ln w="7200">
-            <a:solidFill>
-              <a:srgbClr val="A78425">
-                <a:alpha val="30000"/>
-              </a:srgbClr>
-            </a:solidFill>
-          </a:ln>
-        </p:spPr>
-      </p:cxnSp>
-      <p:cxnSp>
-        <p:nvCxnSpPr>
-          <p:cNvPr id="5" name="Connector 4"/>
-          <p:cNvCxnSpPr/>
-          <p:nvPr/>
-        </p:nvCxnSpPr>
-        <p:spPr>
-          <a:xfrm>
-            <a:off x="0" y="417600"/>
-            <a:ext cx="3240000" cy="0"/>
-          </a:xfrm>
-          <a:prstGeom prst="line">
-            <a:avLst/>
-          </a:prstGeom>
-          <a:ln w="7200">
-            <a:solidFill>
-              <a:srgbClr val="A78425">
-                <a:alpha val="30000"/>
-              </a:srgbClr>
-            </a:solidFill>
-          </a:ln>
-        </p:spPr>
-      </p:cxnSp>
-      <p:cxnSp>
-        <p:nvCxnSpPr>
-          <p:cNvPr id="6" name="Connector 5"/>
-          <p:cNvCxnSpPr/>
-          <p:nvPr/>
-        </p:nvCxnSpPr>
-        <p:spPr>
-          <a:xfrm>
-            <a:off x="0" y="525600"/>
-            <a:ext cx="3240000" cy="0"/>
-          </a:xfrm>
-          <a:prstGeom prst="line">
-            <a:avLst/>
-          </a:prstGeom>
-          <a:ln w="7200">
-            <a:solidFill>
-              <a:srgbClr val="A78425">
-                <a:alpha val="30000"/>
-              </a:srgbClr>
-            </a:solidFill>
-          </a:ln>
-        </p:spPr>
-      </p:cxnSp>
-      <p:cxnSp>
-        <p:nvCxnSpPr>
-          <p:cNvPr id="7" name="Connector 6"/>
-          <p:cNvCxnSpPr/>
-          <p:nvPr/>
-        </p:nvCxnSpPr>
-        <p:spPr>
-          <a:xfrm>
-            <a:off x="0" y="633600"/>
-            <a:ext cx="3240000" cy="0"/>
-          </a:xfrm>
-          <a:prstGeom prst="line">
-            <a:avLst/>
-          </a:prstGeom>
-          <a:ln w="7200">
-            <a:solidFill>
-              <a:srgbClr val="A78425">
-                <a:alpha val="30000"/>
-              </a:srgbClr>
-            </a:solidFill>
-          </a:ln>
-        </p:spPr>
-      </p:cxnSp>
-      <p:cxnSp>
-        <p:nvCxnSpPr>
-          <p:cNvPr id="8" name="Connector 7"/>
-          <p:cNvCxnSpPr/>
-          <p:nvPr/>
-        </p:nvCxnSpPr>
-        <p:spPr>
-          <a:xfrm>
-            <a:off x="0" y="741600"/>
-            <a:ext cx="3240000" cy="0"/>
-          </a:xfrm>
-          <a:prstGeom prst="line">
-            <a:avLst/>
-          </a:prstGeom>
-          <a:ln w="7200">
-            <a:solidFill>
-              <a:srgbClr val="A78425">
-                <a:alpha val="30000"/>
-              </a:srgbClr>
-            </a:solidFill>
-          </a:ln>
-        </p:spPr>
-      </p:cxnSp>
-      <p:cxnSp>
-        <p:nvCxnSpPr>
-          <p:cNvPr id="9" name="Connector 8"/>
-          <p:cNvCxnSpPr/>
-          <p:nvPr/>
-        </p:nvCxnSpPr>
-        <p:spPr>
-          <a:xfrm>
-            <a:off x="0" y="849600"/>
-            <a:ext cx="3240000" cy="0"/>
-          </a:xfrm>
-          <a:prstGeom prst="line">
-            <a:avLst/>
-          </a:prstGeom>
-          <a:ln w="7200">
-            <a:solidFill>
-              <a:srgbClr val="A78425">
-                <a:alpha val="30000"/>
-              </a:srgbClr>
-            </a:solidFill>
-          </a:ln>
-        </p:spPr>
-      </p:cxnSp>
-      <p:cxnSp>
-        <p:nvCxnSpPr>
-          <p:cNvPr id="10" name="Connector 9"/>
-          <p:cNvCxnSpPr/>
-          <p:nvPr/>
-        </p:nvCxnSpPr>
-        <p:spPr>
-          <a:xfrm>
-            <a:off x="0" y="957600"/>
-            <a:ext cx="3240000" cy="0"/>
-          </a:xfrm>
-          <a:prstGeom prst="line">
-            <a:avLst/>
-          </a:prstGeom>
-          <a:ln w="7200">
-            <a:solidFill>
-              <a:srgbClr val="A78425">
-                <a:alpha val="30000"/>
-              </a:srgbClr>
-            </a:solidFill>
-          </a:ln>
-        </p:spPr>
-      </p:cxnSp>
-      <p:cxnSp>
-        <p:nvCxnSpPr>
-          <p:cNvPr id="11" name="Connector 10"/>
-          <p:cNvCxnSpPr/>
-          <p:nvPr/>
-        </p:nvCxnSpPr>
-        <p:spPr>
-          <a:xfrm>
-            <a:off x="0" y="1065600"/>
-            <a:ext cx="3240000" cy="0"/>
-          </a:xfrm>
-          <a:prstGeom prst="line">
-            <a:avLst/>
-          </a:prstGeom>
-          <a:ln w="7200">
-            <a:solidFill>
-              <a:srgbClr val="A78425">
-                <a:alpha val="30000"/>
-              </a:srgbClr>
-            </a:solidFill>
-          </a:ln>
-        </p:spPr>
-      </p:cxnSp>
-      <p:cxnSp>
-        <p:nvCxnSpPr>
-          <p:cNvPr id="12" name="Connector 11"/>
-          <p:cNvCxnSpPr/>
-          <p:nvPr/>
-        </p:nvCxnSpPr>
-        <p:spPr>
-          <a:xfrm>
-            <a:off x="0" y="1173600"/>
-            <a:ext cx="3240000" cy="0"/>
-          </a:xfrm>
-          <a:prstGeom prst="line">
-            <a:avLst/>
-          </a:prstGeom>
-          <a:ln w="7200">
-            <a:solidFill>
-              <a:srgbClr val="A78425">
-                <a:alpha val="30000"/>
-              </a:srgbClr>
-            </a:solidFill>
-          </a:ln>
-        </p:spPr>
-      </p:cxnSp>
-      <p:cxnSp>
-        <p:nvCxnSpPr>
-          <p:cNvPr id="13" name="Connector 12"/>
-          <p:cNvCxnSpPr/>
-          <p:nvPr/>
-        </p:nvCxnSpPr>
-        <p:spPr>
-          <a:xfrm>
-            <a:off x="0" y="1281600"/>
-            <a:ext cx="3240000" cy="0"/>
-          </a:xfrm>
-          <a:prstGeom prst="line">
-            <a:avLst/>
-          </a:prstGeom>
-          <a:ln w="7200">
-            <a:solidFill>
-              <a:srgbClr val="A78425">
-                <a:alpha val="30000"/>
-              </a:srgbClr>
-            </a:solidFill>
-          </a:ln>
-        </p:spPr>
-      </p:cxnSp>
-      <p:cxnSp>
-        <p:nvCxnSpPr>
-          <p:cNvPr id="14" name="Connector 13"/>
-          <p:cNvCxnSpPr/>
-          <p:nvPr/>
-        </p:nvCxnSpPr>
-        <p:spPr>
-          <a:xfrm>
-            <a:off x="0" y="1389600"/>
-            <a:ext cx="3240000" cy="0"/>
-          </a:xfrm>
-          <a:prstGeom prst="line">
-            <a:avLst/>
-          </a:prstGeom>
-          <a:ln w="7200">
-            <a:solidFill>
-              <a:srgbClr val="A78425">
-                <a:alpha val="30000"/>
-              </a:srgbClr>
-            </a:solidFill>
-          </a:ln>
-        </p:spPr>
-      </p:cxnSp>
-      <p:cxnSp>
-        <p:nvCxnSpPr>
-          <p:cNvPr id="15" name="Connector 14"/>
-          <p:cNvCxnSpPr/>
-          <p:nvPr/>
-        </p:nvCxnSpPr>
-        <p:spPr>
-          <a:xfrm>
-            <a:off x="0" y="1497600"/>
-            <a:ext cx="3240000" cy="0"/>
-          </a:xfrm>
-          <a:prstGeom prst="line">
-            <a:avLst/>
-          </a:prstGeom>
-          <a:ln w="7200">
-            <a:solidFill>
-              <a:srgbClr val="A78425">
-                <a:alpha val="30000"/>
-              </a:srgbClr>
-            </a:solidFill>
-          </a:ln>
-        </p:spPr>
-      </p:cxnSp>
-      <p:cxnSp>
-        <p:nvCxnSpPr>
-          <p:cNvPr id="16" name="Connector 15"/>
-          <p:cNvCxnSpPr/>
-          <p:nvPr/>
-        </p:nvCxnSpPr>
-        <p:spPr>
-          <a:xfrm>
-            <a:off x="0" y="1605600"/>
-            <a:ext cx="3240000" cy="0"/>
-          </a:xfrm>
-          <a:prstGeom prst="line">
-            <a:avLst/>
-          </a:prstGeom>
-          <a:ln w="7200">
-            <a:solidFill>
-              <a:srgbClr val="A78425">
-                <a:alpha val="30000"/>
-              </a:srgbClr>
-            </a:solidFill>
-          </a:ln>
-        </p:spPr>
-      </p:cxnSp>
-      <p:cxnSp>
-        <p:nvCxnSpPr>
-          <p:cNvPr id="17" name="Connector 16"/>
-          <p:cNvCxnSpPr/>
-          <p:nvPr/>
-        </p:nvCxnSpPr>
-        <p:spPr>
-          <a:xfrm>
-            <a:off x="0" y="1713600"/>
-            <a:ext cx="3240000" cy="0"/>
-          </a:xfrm>
-          <a:prstGeom prst="line">
-            <a:avLst/>
-          </a:prstGeom>
-          <a:ln w="7200">
-            <a:solidFill>
-              <a:srgbClr val="A78425">
-                <a:alpha val="30000"/>
-              </a:srgbClr>
-            </a:solidFill>
-          </a:ln>
-        </p:spPr>
-      </p:cxnSp>
-      <p:cxnSp>
-        <p:nvCxnSpPr>
-          <p:cNvPr id="18" name="Connector 17"/>
-          <p:cNvCxnSpPr/>
-          <p:nvPr/>
-        </p:nvCxnSpPr>
-        <p:spPr>
-          <a:xfrm>
-            <a:off x="0" y="1821600"/>
-            <a:ext cx="3240000" cy="0"/>
-          </a:xfrm>
-          <a:prstGeom prst="line">
-            <a:avLst/>
-          </a:prstGeom>
-          <a:ln w="7200">
-            <a:solidFill>
-              <a:srgbClr val="A78425">
-                <a:alpha val="30000"/>
-              </a:srgbClr>
-            </a:solidFill>
-          </a:ln>
-        </p:spPr>
-      </p:cxnSp>
-      <p:sp>
-        <p:nvSpPr>
-          <p:cNvPr id="19" name="Rectangle 18"/>
-          <p:cNvSpPr/>
-          <p:nvPr/>
-        </p:nvSpPr>
-        <p:spPr>
-          <a:xfrm>
-            <a:off x="468000" y="468000"/>
-            <a:ext cx="2304000" cy="864000"/>
+            <a:off x="2088000" y="0"/>
+            <a:ext cx="1152000" cy="1800000"/>
           </a:xfrm>
           <a:prstGeom prst="rect">
             <a:avLst/>
           </a:prstGeom>
           <a:solidFill>
-            <a:srgbClr val="FBF8EE"/>
+            <a:srgbClr val="0077FF"/>
           </a:solidFill>
           <a:ln>
             <a:noFill/>
@@ -4144,22 +3627,22 @@
       </p:sp>
       <p:sp>
         <p:nvSpPr>
-          <p:cNvPr id="20" name="Rectangle 19"/>
+          <p:cNvPr id="3" name="Oval 2"/>
           <p:cNvSpPr/>
           <p:nvPr/>
         </p:nvSpPr>
         <p:spPr>
           <a:xfrm>
-            <a:off x="468000" y="468000"/>
-            <a:ext cx="2304000" cy="864000"/>
+            <a:off x="2397600" y="633600"/>
+            <a:ext cx="532800" cy="532800"/>
           </a:xfrm>
-          <a:prstGeom prst="rect">
+          <a:prstGeom prst="ellipse">
             <a:avLst/>
           </a:prstGeom>
           <a:noFill/>
-          <a:ln w="9000">
+          <a:ln w="10800">
             <a:solidFill>
-              <a:srgbClr val="A78425"/>
+              <a:srgbClr val="FFFFFF"/>
             </a:solidFill>
           </a:ln>
         </p:spPr>
@@ -4173,14 +3656,14 @@
       </p:sp>
       <p:sp>
         <p:nvSpPr>
-          <p:cNvPr id="21" name="텍스트"/>
+          <p:cNvPr id="4" name="텍스트"/>
           <p:cNvSpPr txBox="1"/>
           <p:nvPr/>
         </p:nvSpPr>
         <p:spPr>
           <a:xfrm>
-            <a:off x="576000" y="540000"/>
-            <a:ext cx="2088000" cy="720000"/>
+            <a:off x="2304000" y="684000"/>
+            <a:ext cx="720000" cy="432000"/>
           </a:xfrm>
           <a:prstGeom prst="rect">
             <a:avLst/>
@@ -4195,32 +3678,32 @@
           <a:p>
             <a:pPr algn="ctr">
               <a:lnSpc>
-                <a:spcPts val="1667"/>
+                <a:spcPts val="4350"/>
               </a:lnSpc>
             </a:pPr>
             <a:r>
-              <a:rPr sz="1150" b="1">
+              <a:rPr sz="3000" b="1">
                 <a:solidFill>
-                  <a:srgbClr val="544212"/>
+                  <a:srgbClr val="FFFFFF"/>
                 </a:solidFill>
                 <a:latin typeface="맑은 고딕"/>
                 <a:ea typeface="맑은 고딕"/>
               </a:rPr>
-              <a:t>묵묵히 걷는 사람의 발자국</a:t>
-            </a:r>
-          </a:p>
-        </p:txBody>
-      </p:sp>
-      <p:sp>
-        <p:nvSpPr>
-          <p:cNvPr id="22" name="텍스트"/>
+              <a:t>회</a:t>
+            </a:r>
+          </a:p>
+        </p:txBody>
+      </p:sp>
+      <p:sp>
+        <p:nvSpPr>
+          <p:cNvPr id="5" name="텍스트"/>
           <p:cNvSpPr txBox="1"/>
           <p:nvPr/>
         </p:nvSpPr>
         <p:spPr>
           <a:xfrm>
-            <a:off x="360000" y="1468800"/>
-            <a:ext cx="2520000" cy="108000"/>
+            <a:off x="252000" y="540000"/>
+            <a:ext cx="1620000" cy="720000"/>
           </a:xfrm>
           <a:prstGeom prst="rect">
             <a:avLst/>
@@ -4233,15 +3716,72 @@
           </a:bodyPr>
           <a:lstStyle/>
           <a:p>
-            <a:pPr algn="ctr">
+            <a:pPr algn="l">
               <a:lnSpc>
-                <a:spcPts val="1015"/>
+                <a:spcPts val="1739"/>
               </a:lnSpc>
             </a:pPr>
             <a:r>
-              <a:rPr sz="700" b="1" spc="300">
+              <a:rPr sz="1200" b="1">
                 <a:solidFill>
-                  <a:srgbClr val="796E51"/>
+                  <a:srgbClr val="12151C"/>
+                </a:solidFill>
+                <a:latin typeface="맑은 고딕"/>
+                <a:ea typeface="맑은 고딕"/>
+              </a:rPr>
+              <a:t>묵묵히 걷는</a:t>
+            </a:r>
+          </a:p>
+          <a:p>
+            <a:pPr algn="l">
+              <a:lnSpc>
+                <a:spcPts val="1739"/>
+              </a:lnSpc>
+            </a:pPr>
+            <a:r>
+              <a:rPr sz="1200" b="1">
+                <a:solidFill>
+                  <a:srgbClr val="12151C"/>
+                </a:solidFill>
+                <a:latin typeface="맑은 고딕"/>
+                <a:ea typeface="맑은 고딕"/>
+              </a:rPr>
+              <a:t>사람의 발자국</a:t>
+            </a:r>
+          </a:p>
+        </p:txBody>
+      </p:sp>
+      <p:sp>
+        <p:nvSpPr>
+          <p:cNvPr id="6" name="텍스트"/>
+          <p:cNvSpPr txBox="1"/>
+          <p:nvPr/>
+        </p:nvSpPr>
+        <p:spPr>
+          <a:xfrm>
+            <a:off x="252000" y="1512000"/>
+            <a:ext cx="1584000" cy="123826"/>
+          </a:xfrm>
+          <a:prstGeom prst="rect">
+            <a:avLst/>
+          </a:prstGeom>
+          <a:noFill/>
+        </p:spPr>
+        <p:txBody>
+          <a:bodyPr wrap="square" lIns="0" rIns="0" tIns="0" bIns="0" anchor="t">
+            <a:spAutoFit/>
+          </a:bodyPr>
+          <a:lstStyle/>
+          <a:p>
+            <a:pPr algn="l">
+              <a:lnSpc>
+                <a:spcPts val="942"/>
+              </a:lnSpc>
+            </a:pPr>
+            <a:r>
+              <a:rPr sz="650" b="1" spc="200">
+                <a:solidFill>
+                  <a:srgbClr val="0B3A72"/>
                 </a:solidFill>
                 <a:latin typeface="맑은 고딕"/>
                 <a:ea typeface="맑은 고딕"/>

--- a/public/fun/cards/office/office-44.pptx
+++ b/public/fun/cards/office/office-44.pptx
@@ -3105,8 +3105,8 @@
         </p:nvSpPr>
         <p:spPr>
           <a:xfrm>
-            <a:off x="252000" y="144000"/>
-            <a:ext cx="201600" cy="21600"/>
+            <a:off x="0" y="0"/>
+            <a:ext cx="3240000" cy="36000"/>
           </a:xfrm>
           <a:prstGeom prst="rect">
             <a:avLst/>
@@ -3134,8 +3134,8 @@
         </p:nvSpPr>
         <p:spPr>
           <a:xfrm>
-            <a:off x="252000" y="273600"/>
-            <a:ext cx="2160000" cy="360000"/>
+            <a:off x="252000" y="223200"/>
+            <a:ext cx="1296000" cy="237600"/>
           </a:xfrm>
           <a:prstGeom prst="rect">
             <a:avLst/>
@@ -3150,11 +3150,11 @@
           <a:p>
             <a:pPr algn="l">
               <a:lnSpc>
-                <a:spcPts val="3190"/>
+                <a:spcPts val="1957"/>
               </a:lnSpc>
             </a:pPr>
             <a:r>
-              <a:rPr sz="2200" b="1">
+              <a:rPr sz="1350" b="1" spc="120">
                 <a:solidFill>
                   <a:srgbClr val="12151C"/>
                 </a:solidFill>
@@ -3174,8 +3174,8 @@
         </p:nvSpPr>
         <p:spPr>
           <a:xfrm>
-            <a:off x="252000" y="676800"/>
-            <a:ext cx="2160000" cy="171451"/>
+            <a:off x="252000" y="475200"/>
+            <a:ext cx="1296000" cy="133351"/>
           </a:xfrm>
           <a:prstGeom prst="rect">
             <a:avLst/>
@@ -3190,11 +3190,11 @@
           <a:p>
             <a:pPr algn="l">
               <a:lnSpc>
-                <a:spcPts val="1305"/>
+                <a:spcPts val="1015"/>
               </a:lnSpc>
             </a:pPr>
             <a:r>
-              <a:rPr sz="900" b="0">
+              <a:rPr sz="700" b="0">
                 <a:solidFill>
                   <a:srgbClr val="6B7280"/>
                 </a:solidFill>
@@ -3214,7 +3214,7 @@
         </p:nvSpPr>
         <p:spPr>
           <a:xfrm>
-            <a:off x="1548000" y="230400"/>
+            <a:off x="1548000" y="259200"/>
             <a:ext cx="1440000" cy="123826"/>
           </a:xfrm>
           <a:prstGeom prst="rect">
@@ -3234,7 +3234,7 @@
               </a:lnSpc>
             </a:pPr>
             <a:r>
-              <a:rPr sz="650" b="1" spc="200">
+              <a:rPr sz="650" b="1" spc="220">
                 <a:solidFill>
                   <a:srgbClr val="6B7280"/>
                 </a:solidFill>
@@ -3254,13 +3254,13 @@
         </p:nvCxnSpPr>
         <p:spPr>
           <a:xfrm>
-            <a:off x="252000" y="1051200"/>
+            <a:off x="252000" y="907200"/>
             <a:ext cx="2736000" cy="0"/>
           </a:xfrm>
           <a:prstGeom prst="line">
             <a:avLst/>
           </a:prstGeom>
-          <a:ln w="5760">
+          <a:ln w="3600">
             <a:solidFill>
               <a:srgbClr val="DCDFE4"/>
             </a:solidFill>
@@ -3275,8 +3275,8 @@
         </p:nvSpPr>
         <p:spPr>
           <a:xfrm>
-            <a:off x="252000" y="1123200"/>
-            <a:ext cx="576000" cy="99061"/>
+            <a:off x="252000" y="986400"/>
+            <a:ext cx="576000" cy="91441"/>
           </a:xfrm>
           <a:prstGeom prst="rect">
             <a:avLst/>
@@ -3291,11 +3291,11 @@
           <a:p>
             <a:pPr algn="l">
               <a:lnSpc>
-                <a:spcPts val="754"/>
+                <a:spcPts val="696"/>
               </a:lnSpc>
             </a:pPr>
             <a:r>
-              <a:rPr sz="520" b="1" spc="150">
+              <a:rPr sz="480" b="1" spc="160">
                 <a:solidFill>
                   <a:srgbClr val="6B7280"/>
                 </a:solidFill>
@@ -3315,8 +3315,8 @@
         </p:nvSpPr>
         <p:spPr>
           <a:xfrm>
-            <a:off x="900000" y="1101600"/>
-            <a:ext cx="2088000" cy="142876"/>
+            <a:off x="936000" y="968400"/>
+            <a:ext cx="2052000" cy="133351"/>
           </a:xfrm>
           <a:prstGeom prst="rect">
             <a:avLst/>
@@ -3331,11 +3331,11 @@
           <a:p>
             <a:pPr algn="l">
               <a:lnSpc>
-                <a:spcPts val="1087"/>
+                <a:spcPts val="1015"/>
               </a:lnSpc>
             </a:pPr>
             <a:r>
-              <a:rPr sz="750" b="0">
+              <a:rPr sz="700" b="0">
                 <a:solidFill>
                   <a:srgbClr val="12151C"/>
                 </a:solidFill>
@@ -3355,13 +3355,13 @@
         </p:nvCxnSpPr>
         <p:spPr>
           <a:xfrm>
-            <a:off x="252000" y="1274400"/>
+            <a:off x="252000" y="1137600"/>
             <a:ext cx="2736000" cy="0"/>
           </a:xfrm>
           <a:prstGeom prst="line">
             <a:avLst/>
           </a:prstGeom>
-          <a:ln w="5760">
+          <a:ln w="3600">
             <a:solidFill>
               <a:srgbClr val="DCDFE4"/>
             </a:solidFill>
@@ -3376,8 +3376,8 @@
         </p:nvSpPr>
         <p:spPr>
           <a:xfrm>
-            <a:off x="252000" y="1346400"/>
-            <a:ext cx="576000" cy="99061"/>
+            <a:off x="252000" y="1216800"/>
+            <a:ext cx="576000" cy="91441"/>
           </a:xfrm>
           <a:prstGeom prst="rect">
             <a:avLst/>
@@ -3392,11 +3392,11 @@
           <a:p>
             <a:pPr algn="l">
               <a:lnSpc>
-                <a:spcPts val="754"/>
+                <a:spcPts val="696"/>
               </a:lnSpc>
             </a:pPr>
             <a:r>
-              <a:rPr sz="520" b="1" spc="150">
+              <a:rPr sz="480" b="1" spc="160">
                 <a:solidFill>
                   <a:srgbClr val="6B7280"/>
                 </a:solidFill>
@@ -3416,8 +3416,8 @@
         </p:nvSpPr>
         <p:spPr>
           <a:xfrm>
-            <a:off x="900000" y="1324800"/>
-            <a:ext cx="2088000" cy="142876"/>
+            <a:off x="936000" y="1198800"/>
+            <a:ext cx="2052000" cy="133351"/>
           </a:xfrm>
           <a:prstGeom prst="rect">
             <a:avLst/>
@@ -3432,11 +3432,11 @@
           <a:p>
             <a:pPr algn="l">
               <a:lnSpc>
-                <a:spcPts val="1087"/>
+                <a:spcPts val="1015"/>
               </a:lnSpc>
             </a:pPr>
             <a:r>
-              <a:rPr sz="750" b="0">
+              <a:rPr sz="700" b="0">
                 <a:solidFill>
                   <a:srgbClr val="12151C"/>
                 </a:solidFill>
@@ -3456,13 +3456,13 @@
         </p:nvCxnSpPr>
         <p:spPr>
           <a:xfrm>
-            <a:off x="252000" y="1497600"/>
+            <a:off x="252000" y="1368000"/>
             <a:ext cx="2736000" cy="0"/>
           </a:xfrm>
           <a:prstGeom prst="line">
             <a:avLst/>
           </a:prstGeom>
-          <a:ln w="5760">
+          <a:ln w="3600">
             <a:solidFill>
               <a:srgbClr val="DCDFE4"/>
             </a:solidFill>
@@ -3477,8 +3477,8 @@
         </p:nvSpPr>
         <p:spPr>
           <a:xfrm>
-            <a:off x="252000" y="1569600"/>
-            <a:ext cx="576000" cy="99061"/>
+            <a:off x="252000" y="1447200"/>
+            <a:ext cx="576000" cy="91441"/>
           </a:xfrm>
           <a:prstGeom prst="rect">
             <a:avLst/>
@@ -3493,11 +3493,11 @@
           <a:p>
             <a:pPr algn="l">
               <a:lnSpc>
-                <a:spcPts val="754"/>
+                <a:spcPts val="696"/>
               </a:lnSpc>
             </a:pPr>
             <a:r>
-              <a:rPr sz="520" b="1" spc="150">
+              <a:rPr sz="480" b="1" spc="160">
                 <a:solidFill>
                   <a:srgbClr val="6B7280"/>
                 </a:solidFill>
@@ -3517,8 +3517,8 @@
         </p:nvSpPr>
         <p:spPr>
           <a:xfrm>
-            <a:off x="900000" y="1548000"/>
-            <a:ext cx="2088000" cy="142876"/>
+            <a:off x="936000" y="1429200"/>
+            <a:ext cx="2052000" cy="133351"/>
           </a:xfrm>
           <a:prstGeom prst="rect">
             <a:avLst/>
@@ -3533,11 +3533,11 @@
           <a:p>
             <a:pPr algn="l">
               <a:lnSpc>
-                <a:spcPts val="1087"/>
+                <a:spcPts val="1015"/>
               </a:lnSpc>
             </a:pPr>
             <a:r>
-              <a:rPr sz="750" b="0">
+              <a:rPr sz="700" b="0">
                 <a:solidFill>
                   <a:srgbClr val="12151C"/>
                 </a:solidFill>
@@ -3557,13 +3557,13 @@
         </p:nvCxnSpPr>
         <p:spPr>
           <a:xfrm>
-            <a:off x="252000" y="1720800"/>
+            <a:off x="252000" y="1598400"/>
             <a:ext cx="2736000" cy="0"/>
           </a:xfrm>
           <a:prstGeom prst="line">
             <a:avLst/>
           </a:prstGeom>
-          <a:ln w="5760">
+          <a:ln w="3600">
             <a:solidFill>
               <a:srgbClr val="DCDFE4"/>
             </a:solidFill>
@@ -3604,8 +3604,8 @@
         </p:nvSpPr>
         <p:spPr>
           <a:xfrm>
-            <a:off x="2088000" y="0"/>
-            <a:ext cx="1152000" cy="1800000"/>
+            <a:off x="0" y="0"/>
+            <a:ext cx="1188000" cy="1800000"/>
           </a:xfrm>
           <a:prstGeom prst="rect">
             <a:avLst/>
@@ -3625,27 +3625,657 @@
           </a:p>
         </p:txBody>
       </p:sp>
-      <p:sp>
-        <p:nvSpPr>
-          <p:cNvPr id="3" name="Oval 2"/>
-          <p:cNvSpPr/>
-          <p:nvPr/>
-        </p:nvSpPr>
-        <p:spPr>
-          <a:xfrm>
-            <a:off x="2397600" y="633600"/>
-            <a:ext cx="532800" cy="532800"/>
-          </a:xfrm>
-          <a:prstGeom prst="ellipse">
-            <a:avLst/>
-          </a:prstGeom>
-          <a:noFill/>
-          <a:ln w="10800">
+      <p:cxnSp>
+        <p:nvCxnSpPr>
+          <p:cNvPr id="3" name="Connector 2"/>
+          <p:cNvCxnSpPr/>
+          <p:nvPr/>
+        </p:nvCxnSpPr>
+        <p:spPr>
+          <a:xfrm flipV="1">
+            <a:off x="0" y="1224000"/>
+            <a:ext cx="57600" cy="57600"/>
+          </a:xfrm>
+          <a:prstGeom prst="line">
+            <a:avLst/>
+          </a:prstGeom>
+          <a:ln w="3600">
             <a:solidFill>
               <a:srgbClr val="FFFFFF"/>
             </a:solidFill>
           </a:ln>
         </p:spPr>
+      </p:cxnSp>
+      <p:cxnSp>
+        <p:nvCxnSpPr>
+          <p:cNvPr id="4" name="Connector 3"/>
+          <p:cNvCxnSpPr/>
+          <p:nvPr/>
+        </p:nvCxnSpPr>
+        <p:spPr>
+          <a:xfrm flipV="1">
+            <a:off x="0" y="1224000"/>
+            <a:ext cx="115200" cy="115200"/>
+          </a:xfrm>
+          <a:prstGeom prst="line">
+            <a:avLst/>
+          </a:prstGeom>
+          <a:ln w="3600">
+            <a:solidFill>
+              <a:srgbClr val="FFFFFF"/>
+            </a:solidFill>
+          </a:ln>
+        </p:spPr>
+      </p:cxnSp>
+      <p:cxnSp>
+        <p:nvCxnSpPr>
+          <p:cNvPr id="5" name="Connector 4"/>
+          <p:cNvCxnSpPr/>
+          <p:nvPr/>
+        </p:nvCxnSpPr>
+        <p:spPr>
+          <a:xfrm flipV="1">
+            <a:off x="0" y="1224000"/>
+            <a:ext cx="172800" cy="172800"/>
+          </a:xfrm>
+          <a:prstGeom prst="line">
+            <a:avLst/>
+          </a:prstGeom>
+          <a:ln w="3600">
+            <a:solidFill>
+              <a:srgbClr val="FFFFFF"/>
+            </a:solidFill>
+          </a:ln>
+        </p:spPr>
+      </p:cxnSp>
+      <p:cxnSp>
+        <p:nvCxnSpPr>
+          <p:cNvPr id="6" name="Connector 5"/>
+          <p:cNvCxnSpPr/>
+          <p:nvPr/>
+        </p:nvCxnSpPr>
+        <p:spPr>
+          <a:xfrm flipV="1">
+            <a:off x="0" y="1224000"/>
+            <a:ext cx="230400" cy="230400"/>
+          </a:xfrm>
+          <a:prstGeom prst="line">
+            <a:avLst/>
+          </a:prstGeom>
+          <a:ln w="3600">
+            <a:solidFill>
+              <a:srgbClr val="FFFFFF"/>
+            </a:solidFill>
+          </a:ln>
+        </p:spPr>
+      </p:cxnSp>
+      <p:cxnSp>
+        <p:nvCxnSpPr>
+          <p:cNvPr id="7" name="Connector 6"/>
+          <p:cNvCxnSpPr/>
+          <p:nvPr/>
+        </p:nvCxnSpPr>
+        <p:spPr>
+          <a:xfrm flipV="1">
+            <a:off x="0" y="1224000"/>
+            <a:ext cx="288000" cy="288000"/>
+          </a:xfrm>
+          <a:prstGeom prst="line">
+            <a:avLst/>
+          </a:prstGeom>
+          <a:ln w="3600">
+            <a:solidFill>
+              <a:srgbClr val="FFFFFF"/>
+            </a:solidFill>
+          </a:ln>
+        </p:spPr>
+      </p:cxnSp>
+      <p:cxnSp>
+        <p:nvCxnSpPr>
+          <p:cNvPr id="8" name="Connector 7"/>
+          <p:cNvCxnSpPr/>
+          <p:nvPr/>
+        </p:nvCxnSpPr>
+        <p:spPr>
+          <a:xfrm flipV="1">
+            <a:off x="0" y="1224000"/>
+            <a:ext cx="345600" cy="345600"/>
+          </a:xfrm>
+          <a:prstGeom prst="line">
+            <a:avLst/>
+          </a:prstGeom>
+          <a:ln w="3600">
+            <a:solidFill>
+              <a:srgbClr val="FFFFFF"/>
+            </a:solidFill>
+          </a:ln>
+        </p:spPr>
+      </p:cxnSp>
+      <p:cxnSp>
+        <p:nvCxnSpPr>
+          <p:cNvPr id="9" name="Connector 8"/>
+          <p:cNvCxnSpPr/>
+          <p:nvPr/>
+        </p:nvCxnSpPr>
+        <p:spPr>
+          <a:xfrm flipV="1">
+            <a:off x="0" y="1224000"/>
+            <a:ext cx="403200" cy="403200"/>
+          </a:xfrm>
+          <a:prstGeom prst="line">
+            <a:avLst/>
+          </a:prstGeom>
+          <a:ln w="3600">
+            <a:solidFill>
+              <a:srgbClr val="FFFFFF"/>
+            </a:solidFill>
+          </a:ln>
+        </p:spPr>
+      </p:cxnSp>
+      <p:cxnSp>
+        <p:nvCxnSpPr>
+          <p:cNvPr id="10" name="Connector 9"/>
+          <p:cNvCxnSpPr/>
+          <p:nvPr/>
+        </p:nvCxnSpPr>
+        <p:spPr>
+          <a:xfrm flipV="1">
+            <a:off x="0" y="1224000"/>
+            <a:ext cx="460800" cy="460800"/>
+          </a:xfrm>
+          <a:prstGeom prst="line">
+            <a:avLst/>
+          </a:prstGeom>
+          <a:ln w="3600">
+            <a:solidFill>
+              <a:srgbClr val="FFFFFF"/>
+            </a:solidFill>
+          </a:ln>
+        </p:spPr>
+      </p:cxnSp>
+      <p:cxnSp>
+        <p:nvCxnSpPr>
+          <p:cNvPr id="11" name="Connector 10"/>
+          <p:cNvCxnSpPr/>
+          <p:nvPr/>
+        </p:nvCxnSpPr>
+        <p:spPr>
+          <a:xfrm flipV="1">
+            <a:off x="0" y="1224000"/>
+            <a:ext cx="518400" cy="518400"/>
+          </a:xfrm>
+          <a:prstGeom prst="line">
+            <a:avLst/>
+          </a:prstGeom>
+          <a:ln w="3600">
+            <a:solidFill>
+              <a:srgbClr val="FFFFFF"/>
+            </a:solidFill>
+          </a:ln>
+        </p:spPr>
+      </p:cxnSp>
+      <p:cxnSp>
+        <p:nvCxnSpPr>
+          <p:cNvPr id="12" name="Connector 11"/>
+          <p:cNvCxnSpPr/>
+          <p:nvPr/>
+        </p:nvCxnSpPr>
+        <p:spPr>
+          <a:xfrm flipV="1">
+            <a:off x="0" y="1224000"/>
+            <a:ext cx="576000" cy="576000"/>
+          </a:xfrm>
+          <a:prstGeom prst="line">
+            <a:avLst/>
+          </a:prstGeom>
+          <a:ln w="3600">
+            <a:solidFill>
+              <a:srgbClr val="FFFFFF"/>
+            </a:solidFill>
+          </a:ln>
+        </p:spPr>
+      </p:cxnSp>
+      <p:cxnSp>
+        <p:nvCxnSpPr>
+          <p:cNvPr id="13" name="Connector 12"/>
+          <p:cNvCxnSpPr/>
+          <p:nvPr/>
+        </p:nvCxnSpPr>
+        <p:spPr>
+          <a:xfrm flipV="1">
+            <a:off x="57600" y="1224000"/>
+            <a:ext cx="576000" cy="576000"/>
+          </a:xfrm>
+          <a:prstGeom prst="line">
+            <a:avLst/>
+          </a:prstGeom>
+          <a:ln w="3600">
+            <a:solidFill>
+              <a:srgbClr val="FFFFFF"/>
+            </a:solidFill>
+          </a:ln>
+        </p:spPr>
+      </p:cxnSp>
+      <p:cxnSp>
+        <p:nvCxnSpPr>
+          <p:cNvPr id="14" name="Connector 13"/>
+          <p:cNvCxnSpPr/>
+          <p:nvPr/>
+        </p:nvCxnSpPr>
+        <p:spPr>
+          <a:xfrm flipV="1">
+            <a:off x="115200" y="1224000"/>
+            <a:ext cx="576000" cy="576000"/>
+          </a:xfrm>
+          <a:prstGeom prst="line">
+            <a:avLst/>
+          </a:prstGeom>
+          <a:ln w="3600">
+            <a:solidFill>
+              <a:srgbClr val="FFFFFF"/>
+            </a:solidFill>
+          </a:ln>
+        </p:spPr>
+      </p:cxnSp>
+      <p:cxnSp>
+        <p:nvCxnSpPr>
+          <p:cNvPr id="15" name="Connector 14"/>
+          <p:cNvCxnSpPr/>
+          <p:nvPr/>
+        </p:nvCxnSpPr>
+        <p:spPr>
+          <a:xfrm flipV="1">
+            <a:off x="172800" y="1224000"/>
+            <a:ext cx="576000" cy="576000"/>
+          </a:xfrm>
+          <a:prstGeom prst="line">
+            <a:avLst/>
+          </a:prstGeom>
+          <a:ln w="3600">
+            <a:solidFill>
+              <a:srgbClr val="FFFFFF"/>
+            </a:solidFill>
+          </a:ln>
+        </p:spPr>
+      </p:cxnSp>
+      <p:cxnSp>
+        <p:nvCxnSpPr>
+          <p:cNvPr id="16" name="Connector 15"/>
+          <p:cNvCxnSpPr/>
+          <p:nvPr/>
+        </p:nvCxnSpPr>
+        <p:spPr>
+          <a:xfrm flipV="1">
+            <a:off x="230400" y="1224000"/>
+            <a:ext cx="576000" cy="576000"/>
+          </a:xfrm>
+          <a:prstGeom prst="line">
+            <a:avLst/>
+          </a:prstGeom>
+          <a:ln w="3600">
+            <a:solidFill>
+              <a:srgbClr val="FFFFFF"/>
+            </a:solidFill>
+          </a:ln>
+        </p:spPr>
+      </p:cxnSp>
+      <p:cxnSp>
+        <p:nvCxnSpPr>
+          <p:cNvPr id="17" name="Connector 16"/>
+          <p:cNvCxnSpPr/>
+          <p:nvPr/>
+        </p:nvCxnSpPr>
+        <p:spPr>
+          <a:xfrm flipV="1">
+            <a:off x="288000" y="1224000"/>
+            <a:ext cx="576000" cy="576000"/>
+          </a:xfrm>
+          <a:prstGeom prst="line">
+            <a:avLst/>
+          </a:prstGeom>
+          <a:ln w="3600">
+            <a:solidFill>
+              <a:srgbClr val="FFFFFF"/>
+            </a:solidFill>
+          </a:ln>
+        </p:spPr>
+      </p:cxnSp>
+      <p:cxnSp>
+        <p:nvCxnSpPr>
+          <p:cNvPr id="18" name="Connector 17"/>
+          <p:cNvCxnSpPr/>
+          <p:nvPr/>
+        </p:nvCxnSpPr>
+        <p:spPr>
+          <a:xfrm flipV="1">
+            <a:off x="345600" y="1224000"/>
+            <a:ext cx="576000" cy="576000"/>
+          </a:xfrm>
+          <a:prstGeom prst="line">
+            <a:avLst/>
+          </a:prstGeom>
+          <a:ln w="3600">
+            <a:solidFill>
+              <a:srgbClr val="FFFFFF"/>
+            </a:solidFill>
+          </a:ln>
+        </p:spPr>
+      </p:cxnSp>
+      <p:cxnSp>
+        <p:nvCxnSpPr>
+          <p:cNvPr id="19" name="Connector 18"/>
+          <p:cNvCxnSpPr/>
+          <p:nvPr/>
+        </p:nvCxnSpPr>
+        <p:spPr>
+          <a:xfrm flipV="1">
+            <a:off x="403200" y="1224000"/>
+            <a:ext cx="576000" cy="576000"/>
+          </a:xfrm>
+          <a:prstGeom prst="line">
+            <a:avLst/>
+          </a:prstGeom>
+          <a:ln w="3600">
+            <a:solidFill>
+              <a:srgbClr val="FFFFFF"/>
+            </a:solidFill>
+          </a:ln>
+        </p:spPr>
+      </p:cxnSp>
+      <p:cxnSp>
+        <p:nvCxnSpPr>
+          <p:cNvPr id="20" name="Connector 19"/>
+          <p:cNvCxnSpPr/>
+          <p:nvPr/>
+        </p:nvCxnSpPr>
+        <p:spPr>
+          <a:xfrm flipV="1">
+            <a:off x="460800" y="1224000"/>
+            <a:ext cx="576000" cy="576000"/>
+          </a:xfrm>
+          <a:prstGeom prst="line">
+            <a:avLst/>
+          </a:prstGeom>
+          <a:ln w="3600">
+            <a:solidFill>
+              <a:srgbClr val="FFFFFF"/>
+            </a:solidFill>
+          </a:ln>
+        </p:spPr>
+      </p:cxnSp>
+      <p:cxnSp>
+        <p:nvCxnSpPr>
+          <p:cNvPr id="21" name="Connector 20"/>
+          <p:cNvCxnSpPr/>
+          <p:nvPr/>
+        </p:nvCxnSpPr>
+        <p:spPr>
+          <a:xfrm flipV="1">
+            <a:off x="518400" y="1224000"/>
+            <a:ext cx="576000" cy="576000"/>
+          </a:xfrm>
+          <a:prstGeom prst="line">
+            <a:avLst/>
+          </a:prstGeom>
+          <a:ln w="3600">
+            <a:solidFill>
+              <a:srgbClr val="FFFFFF"/>
+            </a:solidFill>
+          </a:ln>
+        </p:spPr>
+      </p:cxnSp>
+      <p:cxnSp>
+        <p:nvCxnSpPr>
+          <p:cNvPr id="22" name="Connector 21"/>
+          <p:cNvCxnSpPr/>
+          <p:nvPr/>
+        </p:nvCxnSpPr>
+        <p:spPr>
+          <a:xfrm flipV="1">
+            <a:off x="576000" y="1224000"/>
+            <a:ext cx="576000" cy="576000"/>
+          </a:xfrm>
+          <a:prstGeom prst="line">
+            <a:avLst/>
+          </a:prstGeom>
+          <a:ln w="3600">
+            <a:solidFill>
+              <a:srgbClr val="FFFFFF"/>
+            </a:solidFill>
+          </a:ln>
+        </p:spPr>
+      </p:cxnSp>
+      <p:cxnSp>
+        <p:nvCxnSpPr>
+          <p:cNvPr id="23" name="Connector 22"/>
+          <p:cNvCxnSpPr/>
+          <p:nvPr/>
+        </p:nvCxnSpPr>
+        <p:spPr>
+          <a:xfrm flipV="1">
+            <a:off x="633600" y="1245600"/>
+            <a:ext cx="554400" cy="554400"/>
+          </a:xfrm>
+          <a:prstGeom prst="line">
+            <a:avLst/>
+          </a:prstGeom>
+          <a:ln w="3600">
+            <a:solidFill>
+              <a:srgbClr val="FFFFFF"/>
+            </a:solidFill>
+          </a:ln>
+        </p:spPr>
+      </p:cxnSp>
+      <p:cxnSp>
+        <p:nvCxnSpPr>
+          <p:cNvPr id="24" name="Connector 23"/>
+          <p:cNvCxnSpPr/>
+          <p:nvPr/>
+        </p:nvCxnSpPr>
+        <p:spPr>
+          <a:xfrm flipV="1">
+            <a:off x="691200" y="1303200"/>
+            <a:ext cx="496800" cy="496800"/>
+          </a:xfrm>
+          <a:prstGeom prst="line">
+            <a:avLst/>
+          </a:prstGeom>
+          <a:ln w="3600">
+            <a:solidFill>
+              <a:srgbClr val="FFFFFF"/>
+            </a:solidFill>
+          </a:ln>
+        </p:spPr>
+      </p:cxnSp>
+      <p:cxnSp>
+        <p:nvCxnSpPr>
+          <p:cNvPr id="25" name="Connector 24"/>
+          <p:cNvCxnSpPr/>
+          <p:nvPr/>
+        </p:nvCxnSpPr>
+        <p:spPr>
+          <a:xfrm flipV="1">
+            <a:off x="748800" y="1360800"/>
+            <a:ext cx="439200" cy="439200"/>
+          </a:xfrm>
+          <a:prstGeom prst="line">
+            <a:avLst/>
+          </a:prstGeom>
+          <a:ln w="3600">
+            <a:solidFill>
+              <a:srgbClr val="FFFFFF"/>
+            </a:solidFill>
+          </a:ln>
+        </p:spPr>
+      </p:cxnSp>
+      <p:cxnSp>
+        <p:nvCxnSpPr>
+          <p:cNvPr id="26" name="Connector 25"/>
+          <p:cNvCxnSpPr/>
+          <p:nvPr/>
+        </p:nvCxnSpPr>
+        <p:spPr>
+          <a:xfrm flipV="1">
+            <a:off x="806400" y="1418400"/>
+            <a:ext cx="381600" cy="381600"/>
+          </a:xfrm>
+          <a:prstGeom prst="line">
+            <a:avLst/>
+          </a:prstGeom>
+          <a:ln w="3600">
+            <a:solidFill>
+              <a:srgbClr val="FFFFFF"/>
+            </a:solidFill>
+          </a:ln>
+        </p:spPr>
+      </p:cxnSp>
+      <p:cxnSp>
+        <p:nvCxnSpPr>
+          <p:cNvPr id="27" name="Connector 26"/>
+          <p:cNvCxnSpPr/>
+          <p:nvPr/>
+        </p:nvCxnSpPr>
+        <p:spPr>
+          <a:xfrm flipV="1">
+            <a:off x="864000" y="1476000"/>
+            <a:ext cx="324000" cy="324000"/>
+          </a:xfrm>
+          <a:prstGeom prst="line">
+            <a:avLst/>
+          </a:prstGeom>
+          <a:ln w="3600">
+            <a:solidFill>
+              <a:srgbClr val="FFFFFF"/>
+            </a:solidFill>
+          </a:ln>
+        </p:spPr>
+      </p:cxnSp>
+      <p:cxnSp>
+        <p:nvCxnSpPr>
+          <p:cNvPr id="28" name="Connector 27"/>
+          <p:cNvCxnSpPr/>
+          <p:nvPr/>
+        </p:nvCxnSpPr>
+        <p:spPr>
+          <a:xfrm flipV="1">
+            <a:off x="921600" y="1533600"/>
+            <a:ext cx="266400" cy="266400"/>
+          </a:xfrm>
+          <a:prstGeom prst="line">
+            <a:avLst/>
+          </a:prstGeom>
+          <a:ln w="3600">
+            <a:solidFill>
+              <a:srgbClr val="FFFFFF"/>
+            </a:solidFill>
+          </a:ln>
+        </p:spPr>
+      </p:cxnSp>
+      <p:cxnSp>
+        <p:nvCxnSpPr>
+          <p:cNvPr id="29" name="Connector 28"/>
+          <p:cNvCxnSpPr/>
+          <p:nvPr/>
+        </p:nvCxnSpPr>
+        <p:spPr>
+          <a:xfrm flipV="1">
+            <a:off x="979200" y="1591200"/>
+            <a:ext cx="208800" cy="208800"/>
+          </a:xfrm>
+          <a:prstGeom prst="line">
+            <a:avLst/>
+          </a:prstGeom>
+          <a:ln w="3600">
+            <a:solidFill>
+              <a:srgbClr val="FFFFFF"/>
+            </a:solidFill>
+          </a:ln>
+        </p:spPr>
+      </p:cxnSp>
+      <p:cxnSp>
+        <p:nvCxnSpPr>
+          <p:cNvPr id="30" name="Connector 29"/>
+          <p:cNvCxnSpPr/>
+          <p:nvPr/>
+        </p:nvCxnSpPr>
+        <p:spPr>
+          <a:xfrm flipV="1">
+            <a:off x="1036800" y="1648800"/>
+            <a:ext cx="151200" cy="151200"/>
+          </a:xfrm>
+          <a:prstGeom prst="line">
+            <a:avLst/>
+          </a:prstGeom>
+          <a:ln w="3600">
+            <a:solidFill>
+              <a:srgbClr val="FFFFFF"/>
+            </a:solidFill>
+          </a:ln>
+        </p:spPr>
+      </p:cxnSp>
+      <p:cxnSp>
+        <p:nvCxnSpPr>
+          <p:cNvPr id="31" name="Connector 30"/>
+          <p:cNvCxnSpPr/>
+          <p:nvPr/>
+        </p:nvCxnSpPr>
+        <p:spPr>
+          <a:xfrm flipV="1">
+            <a:off x="1094400" y="1706400"/>
+            <a:ext cx="93600" cy="93600"/>
+          </a:xfrm>
+          <a:prstGeom prst="line">
+            <a:avLst/>
+          </a:prstGeom>
+          <a:ln w="3600">
+            <a:solidFill>
+              <a:srgbClr val="FFFFFF"/>
+            </a:solidFill>
+          </a:ln>
+        </p:spPr>
+      </p:cxnSp>
+      <p:cxnSp>
+        <p:nvCxnSpPr>
+          <p:cNvPr id="32" name="Connector 31"/>
+          <p:cNvCxnSpPr/>
+          <p:nvPr/>
+        </p:nvCxnSpPr>
+        <p:spPr>
+          <a:xfrm flipV="1">
+            <a:off x="1152000" y="1764000"/>
+            <a:ext cx="36000" cy="36000"/>
+          </a:xfrm>
+          <a:prstGeom prst="line">
+            <a:avLst/>
+          </a:prstGeom>
+          <a:ln w="3600">
+            <a:solidFill>
+              <a:srgbClr val="FFFFFF"/>
+            </a:solidFill>
+          </a:ln>
+        </p:spPr>
+      </p:cxnSp>
+      <p:sp>
+        <p:nvSpPr>
+          <p:cNvPr id="33" name="Oval 32"/>
+          <p:cNvSpPr/>
+          <p:nvPr/>
+        </p:nvSpPr>
+        <p:spPr>
+          <a:xfrm>
+            <a:off x="216000" y="252000"/>
+            <a:ext cx="288000" cy="288000"/>
+          </a:xfrm>
+          <a:prstGeom prst="ellipse">
+            <a:avLst/>
+          </a:prstGeom>
+          <a:noFill/>
+          <a:ln w="5760">
+            <a:solidFill>
+              <a:srgbClr val="FFFFFF"/>
+            </a:solidFill>
+          </a:ln>
+        </p:spPr>
         <p:txBody>
           <a:bodyPr rtlCol="0" anchor="ctr"/>
           <a:lstStyle/>
@@ -3656,14 +4286,14 @@
       </p:sp>
       <p:sp>
         <p:nvSpPr>
-          <p:cNvPr id="4" name="텍스트"/>
+          <p:cNvPr id="34" name="텍스트"/>
           <p:cNvSpPr txBox="1"/>
           <p:nvPr/>
         </p:nvSpPr>
         <p:spPr>
           <a:xfrm>
-            <a:off x="2304000" y="684000"/>
-            <a:ext cx="720000" cy="432000"/>
+            <a:off x="216000" y="252000"/>
+            <a:ext cx="288000" cy="288000"/>
           </a:xfrm>
           <a:prstGeom prst="rect">
             <a:avLst/>
@@ -3678,11 +4308,11 @@
           <a:p>
             <a:pPr algn="ctr">
               <a:lnSpc>
-                <a:spcPts val="4350"/>
+                <a:spcPts val="2030"/>
               </a:lnSpc>
             </a:pPr>
             <a:r>
-              <a:rPr sz="3000" b="1">
+              <a:rPr sz="1400" b="1">
                 <a:solidFill>
                   <a:srgbClr val="FFFFFF"/>
                 </a:solidFill>
@@ -3696,14 +4326,14 @@
       </p:sp>
       <p:sp>
         <p:nvSpPr>
-          <p:cNvPr id="5" name="텍스트"/>
+          <p:cNvPr id="35" name="텍스트"/>
           <p:cNvSpPr txBox="1"/>
           <p:nvPr/>
         </p:nvSpPr>
         <p:spPr>
           <a:xfrm>
-            <a:off x="252000" y="540000"/>
-            <a:ext cx="1620000" cy="720000"/>
+            <a:off x="216000" y="1440000"/>
+            <a:ext cx="828000" cy="142876"/>
           </a:xfrm>
           <a:prstGeom prst="rect">
             <a:avLst/>
@@ -3718,49 +4348,215 @@
           <a:p>
             <a:pPr algn="l">
               <a:lnSpc>
-                <a:spcPts val="1739"/>
+                <a:spcPts val="1087"/>
               </a:lnSpc>
             </a:pPr>
             <a:r>
-              <a:rPr sz="1200" b="1">
+              <a:rPr sz="750" b="1" spc="100">
+                <a:solidFill>
+                  <a:srgbClr val="FFFFFF"/>
+                </a:solidFill>
+                <a:latin typeface="맑은 고딕"/>
+                <a:ea typeface="맑은 고딕"/>
+              </a:rPr>
+              <a:t>담당 업무</a:t>
+            </a:r>
+          </a:p>
+        </p:txBody>
+      </p:sp>
+      <p:sp>
+        <p:nvSpPr>
+          <p:cNvPr id="36" name="텍스트"/>
+          <p:cNvSpPr txBox="1"/>
+          <p:nvPr/>
+        </p:nvSpPr>
+        <p:spPr>
+          <a:xfrm>
+            <a:off x="1440000" y="223200"/>
+            <a:ext cx="1080000" cy="99061"/>
+          </a:xfrm>
+          <a:prstGeom prst="rect">
+            <a:avLst/>
+          </a:prstGeom>
+          <a:noFill/>
+        </p:spPr>
+        <p:txBody>
+          <a:bodyPr wrap="square" lIns="0" rIns="0" tIns="0" bIns="0" anchor="t">
+            <a:spAutoFit/>
+          </a:bodyPr>
+          <a:lstStyle/>
+          <a:p>
+            <a:pPr algn="l">
+              <a:lnSpc>
+                <a:spcPts val="754"/>
+              </a:lnSpc>
+            </a:pPr>
+            <a:r>
+              <a:rPr sz="520" b="1" spc="240">
+                <a:solidFill>
+                  <a:srgbClr val="0B3A72"/>
+                </a:solidFill>
+                <a:latin typeface="맑은 고딕"/>
+                <a:ea typeface="맑은 고딕"/>
+              </a:rPr>
+              <a:t>담당 업무</a:t>
+            </a:r>
+          </a:p>
+        </p:txBody>
+      </p:sp>
+      <p:cxnSp>
+        <p:nvCxnSpPr>
+          <p:cNvPr id="37" name="Connector 36"/>
+          <p:cNvCxnSpPr/>
+          <p:nvPr/>
+        </p:nvCxnSpPr>
+        <p:spPr>
+          <a:xfrm>
+            <a:off x="1440000" y="360000"/>
+            <a:ext cx="1548000" cy="0"/>
+          </a:xfrm>
+          <a:prstGeom prst="line">
+            <a:avLst/>
+          </a:prstGeom>
+          <a:ln w="3600">
+            <a:solidFill>
+              <a:srgbClr val="B8D9FF"/>
+            </a:solidFill>
+          </a:ln>
+        </p:spPr>
+      </p:cxnSp>
+      <p:sp>
+        <p:nvSpPr>
+          <p:cNvPr id="38" name="텍스트"/>
+          <p:cNvSpPr txBox="1"/>
+          <p:nvPr/>
+        </p:nvSpPr>
+        <p:spPr>
+          <a:xfrm>
+            <a:off x="1440000" y="403200"/>
+            <a:ext cx="1296000" cy="133351"/>
+          </a:xfrm>
+          <a:prstGeom prst="rect">
+            <a:avLst/>
+          </a:prstGeom>
+          <a:noFill/>
+        </p:spPr>
+        <p:txBody>
+          <a:bodyPr wrap="square" lIns="0" rIns="0" tIns="0" bIns="0" anchor="t">
+            <a:spAutoFit/>
+          </a:bodyPr>
+          <a:lstStyle/>
+          <a:p>
+            <a:pPr algn="l">
+              <a:lnSpc>
+                <a:spcPts val="1015"/>
+              </a:lnSpc>
+            </a:pPr>
+            <a:r>
+              <a:rPr sz="700" b="0">
                 <a:solidFill>
                   <a:srgbClr val="12151C"/>
                 </a:solidFill>
                 <a:latin typeface="맑은 고딕"/>
                 <a:ea typeface="맑은 고딕"/>
               </a:rPr>
-              <a:t>묵묵히 걷는</a:t>
-            </a:r>
-          </a:p>
+              <a:t>영업 관리</a:t>
+            </a:r>
+          </a:p>
+        </p:txBody>
+      </p:sp>
+      <p:cxnSp>
+        <p:nvCxnSpPr>
+          <p:cNvPr id="39" name="Connector 38"/>
+          <p:cNvCxnSpPr/>
+          <p:nvPr/>
+        </p:nvCxnSpPr>
+        <p:spPr>
+          <a:xfrm>
+            <a:off x="1440000" y="561600"/>
+            <a:ext cx="1548000" cy="0"/>
+          </a:xfrm>
+          <a:prstGeom prst="line">
+            <a:avLst/>
+          </a:prstGeom>
+          <a:ln w="3600">
+            <a:solidFill>
+              <a:srgbClr val="B8D9FF"/>
+            </a:solidFill>
+          </a:ln>
+        </p:spPr>
+      </p:cxnSp>
+      <p:sp>
+        <p:nvSpPr>
+          <p:cNvPr id="40" name="텍스트"/>
+          <p:cNvSpPr txBox="1"/>
+          <p:nvPr/>
+        </p:nvSpPr>
+        <p:spPr>
+          <a:xfrm>
+            <a:off x="1440000" y="604800"/>
+            <a:ext cx="1296000" cy="133351"/>
+          </a:xfrm>
+          <a:prstGeom prst="rect">
+            <a:avLst/>
+          </a:prstGeom>
+          <a:noFill/>
+        </p:spPr>
+        <p:txBody>
+          <a:bodyPr wrap="square" lIns="0" rIns="0" tIns="0" bIns="0" anchor="t">
+            <a:spAutoFit/>
+          </a:bodyPr>
+          <a:lstStyle/>
           <a:p>
             <a:pPr algn="l">
               <a:lnSpc>
-                <a:spcPts val="1739"/>
+                <a:spcPts val="1015"/>
               </a:lnSpc>
             </a:pPr>
             <a:r>
-              <a:rPr sz="1200" b="1">
+              <a:rPr sz="700" b="0">
                 <a:solidFill>
                   <a:srgbClr val="12151C"/>
                 </a:solidFill>
                 <a:latin typeface="맑은 고딕"/>
                 <a:ea typeface="맑은 고딕"/>
               </a:rPr>
-              <a:t>사람의 발자국</a:t>
-            </a:r>
-          </a:p>
-        </p:txBody>
-      </p:sp>
-      <p:sp>
-        <p:nvSpPr>
-          <p:cNvPr id="6" name="텍스트"/>
+              <a:t>계약 관리</a:t>
+            </a:r>
+          </a:p>
+        </p:txBody>
+      </p:sp>
+      <p:cxnSp>
+        <p:nvCxnSpPr>
+          <p:cNvPr id="41" name="Connector 40"/>
+          <p:cNvCxnSpPr/>
+          <p:nvPr/>
+        </p:nvCxnSpPr>
+        <p:spPr>
+          <a:xfrm>
+            <a:off x="1440000" y="763200"/>
+            <a:ext cx="1548000" cy="0"/>
+          </a:xfrm>
+          <a:prstGeom prst="line">
+            <a:avLst/>
+          </a:prstGeom>
+          <a:ln w="3600">
+            <a:solidFill>
+              <a:srgbClr val="B8D9FF"/>
+            </a:solidFill>
+          </a:ln>
+        </p:spPr>
+      </p:cxnSp>
+      <p:sp>
+        <p:nvSpPr>
+          <p:cNvPr id="42" name="텍스트"/>
           <p:cNvSpPr txBox="1"/>
           <p:nvPr/>
         </p:nvSpPr>
         <p:spPr>
           <a:xfrm>
-            <a:off x="252000" y="1512000"/>
-            <a:ext cx="1584000" cy="123826"/>
+            <a:off x="1440000" y="806400"/>
+            <a:ext cx="1296000" cy="133351"/>
           </a:xfrm>
           <a:prstGeom prst="rect">
             <a:avLst/>
@@ -3775,18 +4571,140 @@
           <a:p>
             <a:pPr algn="l">
               <a:lnSpc>
-                <a:spcPts val="942"/>
+                <a:spcPts val="1015"/>
               </a:lnSpc>
             </a:pPr>
             <a:r>
-              <a:rPr sz="650" b="1" spc="200">
+              <a:rPr sz="700" b="0">
+                <a:solidFill>
+                  <a:srgbClr val="12151C"/>
+                </a:solidFill>
+                <a:latin typeface="맑은 고딕"/>
+                <a:ea typeface="맑은 고딕"/>
+              </a:rPr>
+              <a:t>제휴 문의</a:t>
+            </a:r>
+          </a:p>
+        </p:txBody>
+      </p:sp>
+      <p:cxnSp>
+        <p:nvCxnSpPr>
+          <p:cNvPr id="43" name="Connector 42"/>
+          <p:cNvCxnSpPr/>
+          <p:nvPr/>
+        </p:nvCxnSpPr>
+        <p:spPr>
+          <a:xfrm>
+            <a:off x="1440000" y="964800"/>
+            <a:ext cx="1548000" cy="0"/>
+          </a:xfrm>
+          <a:prstGeom prst="line">
+            <a:avLst/>
+          </a:prstGeom>
+          <a:ln w="3600">
+            <a:solidFill>
+              <a:srgbClr val="B8D9FF"/>
+            </a:solidFill>
+          </a:ln>
+        </p:spPr>
+      </p:cxnSp>
+      <p:sp>
+        <p:nvSpPr>
+          <p:cNvPr id="44" name="텍스트"/>
+          <p:cNvSpPr txBox="1"/>
+          <p:nvPr/>
+        </p:nvSpPr>
+        <p:spPr>
+          <a:xfrm>
+            <a:off x="1440000" y="1008000"/>
+            <a:ext cx="1296000" cy="133351"/>
+          </a:xfrm>
+          <a:prstGeom prst="rect">
+            <a:avLst/>
+          </a:prstGeom>
+          <a:noFill/>
+        </p:spPr>
+        <p:txBody>
+          <a:bodyPr wrap="square" lIns="0" rIns="0" tIns="0" bIns="0" anchor="t">
+            <a:spAutoFit/>
+          </a:bodyPr>
+          <a:lstStyle/>
+          <a:p>
+            <a:pPr algn="l">
+              <a:lnSpc>
+                <a:spcPts val="1015"/>
+              </a:lnSpc>
+            </a:pPr>
+            <a:r>
+              <a:rPr sz="700" b="0">
+                <a:solidFill>
+                  <a:srgbClr val="12151C"/>
+                </a:solidFill>
+                <a:latin typeface="맑은 고딕"/>
+                <a:ea typeface="맑은 고딕"/>
+              </a:rPr>
+              <a:t>품질 관리</a:t>
+            </a:r>
+          </a:p>
+        </p:txBody>
+      </p:sp>
+      <p:cxnSp>
+        <p:nvCxnSpPr>
+          <p:cNvPr id="45" name="Connector 44"/>
+          <p:cNvCxnSpPr/>
+          <p:nvPr/>
+        </p:nvCxnSpPr>
+        <p:spPr>
+          <a:xfrm>
+            <a:off x="1440000" y="1166400"/>
+            <a:ext cx="1548000" cy="0"/>
+          </a:xfrm>
+          <a:prstGeom prst="line">
+            <a:avLst/>
+          </a:prstGeom>
+          <a:ln w="3600">
+            <a:solidFill>
+              <a:srgbClr val="B8D9FF"/>
+            </a:solidFill>
+          </a:ln>
+        </p:spPr>
+      </p:cxnSp>
+      <p:sp>
+        <p:nvSpPr>
+          <p:cNvPr id="46" name="텍스트"/>
+          <p:cNvSpPr txBox="1"/>
+          <p:nvPr/>
+        </p:nvSpPr>
+        <p:spPr>
+          <a:xfrm>
+            <a:off x="1440000" y="1569600"/>
+            <a:ext cx="1548000" cy="114301"/>
+          </a:xfrm>
+          <a:prstGeom prst="rect">
+            <a:avLst/>
+          </a:prstGeom>
+          <a:noFill/>
+        </p:spPr>
+        <p:txBody>
+          <a:bodyPr wrap="square" lIns="0" rIns="0" tIns="0" bIns="0" anchor="t">
+            <a:spAutoFit/>
+          </a:bodyPr>
+          <a:lstStyle/>
+          <a:p>
+            <a:pPr algn="l">
+              <a:lnSpc>
+                <a:spcPts val="869"/>
+              </a:lnSpc>
+            </a:pPr>
+            <a:r>
+              <a:rPr sz="600" b="0">
                 <a:solidFill>
                   <a:srgbClr val="0B3A72"/>
                 </a:solidFill>
                 <a:latin typeface="맑은 고딕"/>
                 <a:ea typeface="맑은 고딕"/>
               </a:rPr>
-              <a:t>회사명 · 부서명</a:t>
+              <a:t>평일 09:00 – 18:00   |   @채널아이디</a:t>
             </a:r>
           </a:p>
         </p:txBody>
